--- a/WebDev_Presentation.pptx
+++ b/WebDev_Presentation.pptx
@@ -15,7 +15,7 @@
     <p:sldId id="266" r:id="rId6"/>
     <p:sldId id="271" r:id="rId7"/>
     <p:sldId id="309" r:id="rId8"/>
-    <p:sldId id="305" r:id="rId9"/>
+    <p:sldId id="316" r:id="rId9"/>
     <p:sldId id="295" r:id="rId10"/>
   </p:sldIdLst>
   <p:sldSz cx="12192000" cy="6858000"/>
@@ -227,7 +227,7 @@
           <a:p>
             <a:fld id="{367A1AC4-3AE8-4F87-AAED-904EC6054702}" type="datetimeFigureOut">
               <a:rPr lang="en-US" smtClean="0"/>
-              <a:t>12/1/2025</a:t>
+              <a:t>12/3/25</a:t>
             </a:fld>
             <a:endParaRPr lang="en-US" dirty="0"/>
           </a:p>
@@ -404,7 +404,7 @@
           <a:p>
             <a:fld id="{C5556653-6123-4FE4-861F-5F9583BF59B0}" type="datetimeFigureOut">
               <a:rPr lang="en-US" smtClean="0"/>
-              <a:t>12/1/2025</a:t>
+              <a:t>12/3/25</a:t>
             </a:fld>
             <a:endParaRPr lang="en-US" dirty="0"/>
           </a:p>
@@ -1046,7 +1046,13 @@
   <p:cSld>
     <p:spTree>
       <p:nvGrpSpPr>
-        <p:cNvPr id="1" name=""/>
+        <p:cNvPr id="1" name="">
+          <a:extLst>
+            <a:ext uri="{FF2B5EF4-FFF2-40B4-BE49-F238E27FC236}">
+              <a16:creationId xmlns:a16="http://schemas.microsoft.com/office/drawing/2014/main" id="{BAEE3493-D862-4678-924F-A885CA8333F3}"/>
+            </a:ext>
+          </a:extLst>
+        </p:cNvPr>
         <p:cNvGrpSpPr/>
         <p:nvPr/>
       </p:nvGrpSpPr>
@@ -1060,7 +1066,13 @@
       </p:grpSpPr>
       <p:sp>
         <p:nvSpPr>
-          <p:cNvPr id="2" name="Slide Image Placeholder 1"/>
+          <p:cNvPr id="2" name="Slide Image Placeholder 1">
+            <a:extLst>
+              <a:ext uri="{FF2B5EF4-FFF2-40B4-BE49-F238E27FC236}">
+                <a16:creationId xmlns:a16="http://schemas.microsoft.com/office/drawing/2014/main" id="{6E04B000-E514-209A-008D-4A2DAC0F39EC}"/>
+              </a:ext>
+            </a:extLst>
+          </p:cNvPr>
           <p:cNvSpPr>
             <a:spLocks noGrp="1" noRot="1" noChangeAspect="1"/>
           </p:cNvSpPr>
@@ -1072,7 +1084,13 @@
       </p:sp>
       <p:sp>
         <p:nvSpPr>
-          <p:cNvPr id="3" name="Notes Placeholder 2"/>
+          <p:cNvPr id="3" name="Notes Placeholder 2">
+            <a:extLst>
+              <a:ext uri="{FF2B5EF4-FFF2-40B4-BE49-F238E27FC236}">
+                <a16:creationId xmlns:a16="http://schemas.microsoft.com/office/drawing/2014/main" id="{40E32636-2DFE-5BD7-E9F9-587F00F9239E}"/>
+              </a:ext>
+            </a:extLst>
+          </p:cNvPr>
           <p:cNvSpPr>
             <a:spLocks noGrp="1"/>
           </p:cNvSpPr>
@@ -1091,7 +1109,13 @@
       </p:sp>
       <p:sp>
         <p:nvSpPr>
-          <p:cNvPr id="4" name="Slide Number Placeholder 3"/>
+          <p:cNvPr id="4" name="Slide Number Placeholder 3">
+            <a:extLst>
+              <a:ext uri="{FF2B5EF4-FFF2-40B4-BE49-F238E27FC236}">
+                <a16:creationId xmlns:a16="http://schemas.microsoft.com/office/drawing/2014/main" id="{CC18F6BB-FF65-B2F8-80D6-07F3ED6E9D5B}"/>
+              </a:ext>
+            </a:extLst>
+          </p:cNvPr>
           <p:cNvSpPr>
             <a:spLocks noGrp="1"/>
           </p:cNvSpPr>
@@ -1115,7 +1139,7 @@
     </p:spTree>
     <p:extLst>
       <p:ext uri="{BB962C8B-B14F-4D97-AF65-F5344CB8AC3E}">
-        <p14:creationId xmlns:p14="http://schemas.microsoft.com/office/powerpoint/2010/main" val="2714327902"/>
+        <p14:creationId xmlns:p14="http://schemas.microsoft.com/office/powerpoint/2010/main" val="2651503451"/>
       </p:ext>
     </p:extLst>
   </p:cSld>
@@ -4004,692 +4028,6 @@
 
 <file path=ppt/slideLayouts/slideLayout15.xml><?xml version="1.0" encoding="utf-8"?>
 <p:sldLayout xmlns:a="http://schemas.openxmlformats.org/drawingml/2006/main" xmlns:r="http://schemas.openxmlformats.org/officeDocument/2006/relationships" xmlns:p="http://schemas.openxmlformats.org/presentationml/2006/main" userDrawn="1">
-  <p:cSld name="Two Content 2">
-    <p:spTree>
-      <p:nvGrpSpPr>
-        <p:cNvPr id="1" name=""/>
-        <p:cNvGrpSpPr/>
-        <p:nvPr/>
-      </p:nvGrpSpPr>
-      <p:grpSpPr>
-        <a:xfrm>
-          <a:off x="0" y="0"/>
-          <a:ext cx="0" cy="0"/>
-          <a:chOff x="0" y="0"/>
-          <a:chExt cx="0" cy="0"/>
-        </a:xfrm>
-      </p:grpSpPr>
-      <p:sp useBgFill="1">
-        <p:nvSpPr>
-          <p:cNvPr id="6" name="Rectangle 5">
-            <a:extLst>
-              <a:ext uri="{FF2B5EF4-FFF2-40B4-BE49-F238E27FC236}">
-                <a16:creationId xmlns:a16="http://schemas.microsoft.com/office/drawing/2014/main" id="{2DF88512-9E62-4695-B350-39488566A1F7}"/>
-              </a:ext>
-              <a:ext uri="{C183D7F6-B498-43B3-948B-1728B52AA6E4}">
-                <adec:decorative xmlns:adec="http://schemas.microsoft.com/office/drawing/2017/decorative" val="1"/>
-              </a:ext>
-            </a:extLst>
-          </p:cNvPr>
-          <p:cNvSpPr/>
-          <p:nvPr userDrawn="1"/>
-        </p:nvSpPr>
-        <p:spPr>
-          <a:xfrm>
-            <a:off x="0" y="0"/>
-            <a:ext cx="12192001" cy="6858000"/>
-          </a:xfrm>
-          <a:prstGeom prst="rect">
-            <a:avLst/>
-          </a:prstGeom>
-          <a:ln>
-            <a:noFill/>
-          </a:ln>
-        </p:spPr>
-        <p:style>
-          <a:lnRef idx="2">
-            <a:schemeClr val="accent1">
-              <a:shade val="50000"/>
-            </a:schemeClr>
-          </a:lnRef>
-          <a:fillRef idx="1">
-            <a:schemeClr val="accent1"/>
-          </a:fillRef>
-          <a:effectRef idx="0">
-            <a:schemeClr val="accent1"/>
-          </a:effectRef>
-          <a:fontRef idx="minor">
-            <a:schemeClr val="lt1"/>
-          </a:fontRef>
-        </p:style>
-        <p:txBody>
-          <a:bodyPr rtlCol="0" anchor="ctr"/>
-          <a:lstStyle/>
-          <a:p>
-            <a:pPr algn="ctr"/>
-            <a:endParaRPr lang="en-US" dirty="0"/>
-          </a:p>
-        </p:txBody>
-      </p:sp>
-      <p:sp>
-        <p:nvSpPr>
-          <p:cNvPr id="7" name="Rectangle 6">
-            <a:extLst>
-              <a:ext uri="{FF2B5EF4-FFF2-40B4-BE49-F238E27FC236}">
-                <a16:creationId xmlns:a16="http://schemas.microsoft.com/office/drawing/2014/main" id="{18CD596D-95F4-4C5C-A0E7-86D747FE70BE}"/>
-              </a:ext>
-              <a:ext uri="{C183D7F6-B498-43B3-948B-1728B52AA6E4}">
-                <adec:decorative xmlns:adec="http://schemas.microsoft.com/office/drawing/2017/decorative" val="1"/>
-              </a:ext>
-            </a:extLst>
-          </p:cNvPr>
-          <p:cNvSpPr/>
-          <p:nvPr userDrawn="1"/>
-        </p:nvSpPr>
-        <p:spPr>
-          <a:xfrm>
-            <a:off x="1038768" y="2130218"/>
-            <a:ext cx="11153231" cy="4727782"/>
-          </a:xfrm>
-          <a:prstGeom prst="rect">
-            <a:avLst/>
-          </a:prstGeom>
-          <a:solidFill>
-            <a:schemeClr val="bg1">
-              <a:alpha val="75000"/>
-            </a:schemeClr>
-          </a:solidFill>
-          <a:ln>
-            <a:noFill/>
-          </a:ln>
-        </p:spPr>
-        <p:style>
-          <a:lnRef idx="2">
-            <a:schemeClr val="accent1">
-              <a:shade val="50000"/>
-            </a:schemeClr>
-          </a:lnRef>
-          <a:fillRef idx="1">
-            <a:schemeClr val="accent1"/>
-          </a:fillRef>
-          <a:effectRef idx="0">
-            <a:schemeClr val="accent1"/>
-          </a:effectRef>
-          <a:fontRef idx="minor">
-            <a:schemeClr val="lt1"/>
-          </a:fontRef>
-        </p:style>
-        <p:txBody>
-          <a:bodyPr rtlCol="0" anchor="ctr"/>
-          <a:lstStyle/>
-          <a:p>
-            <a:pPr algn="ctr"/>
-            <a:endParaRPr lang="en-US" dirty="0"/>
-          </a:p>
-        </p:txBody>
-      </p:sp>
-      <p:sp>
-        <p:nvSpPr>
-          <p:cNvPr id="8" name="Rectangle 7">
-            <a:extLst>
-              <a:ext uri="{FF2B5EF4-FFF2-40B4-BE49-F238E27FC236}">
-                <a16:creationId xmlns:a16="http://schemas.microsoft.com/office/drawing/2014/main" id="{67553E9F-DCBF-4BEE-A261-5AA97361A0E0}"/>
-              </a:ext>
-              <a:ext uri="{C183D7F6-B498-43B3-948B-1728B52AA6E4}">
-                <adec:decorative xmlns:adec="http://schemas.microsoft.com/office/drawing/2017/decorative" val="1"/>
-              </a:ext>
-            </a:extLst>
-          </p:cNvPr>
-          <p:cNvSpPr/>
-          <p:nvPr userDrawn="1"/>
-        </p:nvSpPr>
-        <p:spPr>
-          <a:xfrm>
-            <a:off x="0" y="896641"/>
-            <a:ext cx="12192000" cy="1347716"/>
-          </a:xfrm>
-          <a:prstGeom prst="rect">
-            <a:avLst/>
-          </a:prstGeom>
-          <a:solidFill>
-            <a:schemeClr val="tx2"/>
-          </a:solidFill>
-          <a:ln>
-            <a:noFill/>
-          </a:ln>
-        </p:spPr>
-        <p:style>
-          <a:lnRef idx="2">
-            <a:schemeClr val="accent1">
-              <a:shade val="50000"/>
-            </a:schemeClr>
-          </a:lnRef>
-          <a:fillRef idx="1">
-            <a:schemeClr val="accent1"/>
-          </a:fillRef>
-          <a:effectRef idx="0">
-            <a:schemeClr val="accent1"/>
-          </a:effectRef>
-          <a:fontRef idx="minor">
-            <a:schemeClr val="lt1"/>
-          </a:fontRef>
-        </p:style>
-        <p:txBody>
-          <a:bodyPr rtlCol="0" anchor="ctr"/>
-          <a:lstStyle/>
-          <a:p>
-            <a:pPr algn="ctr"/>
-            <a:endParaRPr lang="en-US" dirty="0"/>
-          </a:p>
-        </p:txBody>
-      </p:sp>
-      <p:sp>
-        <p:nvSpPr>
-          <p:cNvPr id="9" name="Title 1">
-            <a:extLst>
-              <a:ext uri="{FF2B5EF4-FFF2-40B4-BE49-F238E27FC236}">
-                <a16:creationId xmlns:a16="http://schemas.microsoft.com/office/drawing/2014/main" id="{949B0EB0-AEBA-44ED-BC77-4188C7486144}"/>
-              </a:ext>
-            </a:extLst>
-          </p:cNvPr>
-          <p:cNvSpPr>
-            <a:spLocks noGrp="1"/>
-          </p:cNvSpPr>
-          <p:nvPr>
-            <p:ph type="title" hasCustomPrompt="1"/>
-          </p:nvPr>
-        </p:nvSpPr>
-        <p:spPr>
-          <a:xfrm>
-            <a:off x="1535371" y="962423"/>
-            <a:ext cx="10013710" cy="1216152"/>
-          </a:xfrm>
-        </p:spPr>
-        <p:txBody>
-          <a:bodyPr tIns="182880" anchor="ctr" anchorCtr="0">
-            <a:noAutofit/>
-          </a:bodyPr>
-          <a:lstStyle>
-            <a:lvl1pPr>
-              <a:lnSpc>
-                <a:spcPct val="100000"/>
-              </a:lnSpc>
-              <a:defRPr sz="3200">
-                <a:solidFill>
-                  <a:schemeClr val="bg1"/>
-                </a:solidFill>
-              </a:defRPr>
-            </a:lvl1pPr>
-          </a:lstStyle>
-          <a:p>
-            <a:r>
-              <a:rPr lang="en-US" dirty="0">
-                <a:solidFill>
-                  <a:schemeClr val="bg1"/>
-                </a:solidFill>
-              </a:rPr>
-              <a:t>Click to add title</a:t>
-            </a:r>
-          </a:p>
-        </p:txBody>
-      </p:sp>
-      <p:sp>
-        <p:nvSpPr>
-          <p:cNvPr id="2" name="Content Placeholder 2">
-            <a:extLst>
-              <a:ext uri="{FF2B5EF4-FFF2-40B4-BE49-F238E27FC236}">
-                <a16:creationId xmlns:a16="http://schemas.microsoft.com/office/drawing/2014/main" id="{252AD8E1-37CB-EB1E-9394-A293E1F2107F}"/>
-              </a:ext>
-            </a:extLst>
-          </p:cNvPr>
-          <p:cNvSpPr>
-            <a:spLocks noGrp="1"/>
-          </p:cNvSpPr>
-          <p:nvPr>
-            <p:ph sz="quarter" idx="18" hasCustomPrompt="1"/>
-          </p:nvPr>
-        </p:nvSpPr>
-        <p:spPr>
-          <a:xfrm>
-            <a:off x="1542563" y="2590800"/>
-            <a:ext cx="6441412" cy="3718557"/>
-          </a:xfrm>
-        </p:spPr>
-        <p:txBody>
-          <a:bodyPr anchor="t">
-            <a:normAutofit/>
-          </a:bodyPr>
-          <a:lstStyle>
-            <a:lvl1pPr marL="0" indent="0">
-              <a:lnSpc>
-                <a:spcPct val="125000"/>
-              </a:lnSpc>
-              <a:spcAft>
-                <a:spcPts val="600"/>
-              </a:spcAft>
-              <a:buNone/>
-              <a:defRPr sz="1800" b="0"/>
-            </a:lvl1pPr>
-            <a:lvl2pPr marL="283464">
-              <a:lnSpc>
-                <a:spcPct val="125000"/>
-              </a:lnSpc>
-              <a:spcAft>
-                <a:spcPts val="600"/>
-              </a:spcAft>
-              <a:defRPr sz="1800"/>
-            </a:lvl2pPr>
-            <a:lvl3pPr marL="566928">
-              <a:lnSpc>
-                <a:spcPct val="125000"/>
-              </a:lnSpc>
-              <a:spcAft>
-                <a:spcPts val="600"/>
-              </a:spcAft>
-              <a:defRPr sz="1800"/>
-            </a:lvl3pPr>
-            <a:lvl4pPr marL="850392">
-              <a:lnSpc>
-                <a:spcPct val="125000"/>
-              </a:lnSpc>
-              <a:spcAft>
-                <a:spcPts val="600"/>
-              </a:spcAft>
-              <a:defRPr sz="1800"/>
-            </a:lvl4pPr>
-            <a:lvl5pPr marL="1133856">
-              <a:lnSpc>
-                <a:spcPct val="125000"/>
-              </a:lnSpc>
-              <a:spcAft>
-                <a:spcPts val="600"/>
-              </a:spcAft>
-              <a:defRPr sz="1800"/>
-            </a:lvl5pPr>
-          </a:lstStyle>
-          <a:p>
-            <a:pPr lvl="0"/>
-            <a:r>
-              <a:rPr lang="en-US" dirty="0"/>
-              <a:t>Click to add text</a:t>
-            </a:r>
-          </a:p>
-          <a:p>
-            <a:pPr lvl="1"/>
-            <a:r>
-              <a:rPr lang="en-US" dirty="0"/>
-              <a:t>Second level</a:t>
-            </a:r>
-          </a:p>
-          <a:p>
-            <a:pPr lvl="2"/>
-            <a:r>
-              <a:rPr lang="en-US" dirty="0"/>
-              <a:t>Third level</a:t>
-            </a:r>
-          </a:p>
-          <a:p>
-            <a:pPr lvl="3"/>
-            <a:r>
-              <a:rPr lang="en-US" dirty="0"/>
-              <a:t>Fourth level</a:t>
-            </a:r>
-          </a:p>
-          <a:p>
-            <a:pPr lvl="4"/>
-            <a:r>
-              <a:rPr lang="en-US" dirty="0"/>
-              <a:t>Fifth level</a:t>
-            </a:r>
-          </a:p>
-        </p:txBody>
-      </p:sp>
-      <p:sp>
-        <p:nvSpPr>
-          <p:cNvPr id="16" name="Content Placeholder 2">
-            <a:extLst>
-              <a:ext uri="{FF2B5EF4-FFF2-40B4-BE49-F238E27FC236}">
-                <a16:creationId xmlns:a16="http://schemas.microsoft.com/office/drawing/2014/main" id="{5B37B294-6F01-986D-E8E5-119AE9A8F2BE}"/>
-              </a:ext>
-            </a:extLst>
-          </p:cNvPr>
-          <p:cNvSpPr>
-            <a:spLocks noGrp="1"/>
-          </p:cNvSpPr>
-          <p:nvPr>
-            <p:ph sz="quarter" idx="17" hasCustomPrompt="1"/>
-          </p:nvPr>
-        </p:nvSpPr>
-        <p:spPr>
-          <a:xfrm>
-            <a:off x="8197362" y="2590800"/>
-            <a:ext cx="3522849" cy="3718557"/>
-          </a:xfrm>
-        </p:spPr>
-        <p:txBody>
-          <a:bodyPr anchor="t">
-            <a:normAutofit/>
-          </a:bodyPr>
-          <a:lstStyle>
-            <a:lvl1pPr marL="285750" indent="-285750">
-              <a:lnSpc>
-                <a:spcPct val="125000"/>
-              </a:lnSpc>
-              <a:spcAft>
-                <a:spcPts val="600"/>
-              </a:spcAft>
-              <a:buFont typeface="Wingdings" panose="05000000000000000000" pitchFamily="2" charset="2"/>
-              <a:buChar char="§"/>
-              <a:defRPr sz="1800" b="0"/>
-            </a:lvl1pPr>
-            <a:lvl2pPr>
-              <a:lnSpc>
-                <a:spcPct val="125000"/>
-              </a:lnSpc>
-              <a:spcAft>
-                <a:spcPts val="600"/>
-              </a:spcAft>
-              <a:defRPr sz="1800"/>
-            </a:lvl2pPr>
-            <a:lvl3pPr>
-              <a:lnSpc>
-                <a:spcPct val="125000"/>
-              </a:lnSpc>
-              <a:spcAft>
-                <a:spcPts val="600"/>
-              </a:spcAft>
-              <a:defRPr sz="1800"/>
-            </a:lvl3pPr>
-            <a:lvl4pPr>
-              <a:lnSpc>
-                <a:spcPct val="125000"/>
-              </a:lnSpc>
-              <a:spcAft>
-                <a:spcPts val="600"/>
-              </a:spcAft>
-              <a:defRPr sz="1800"/>
-            </a:lvl4pPr>
-            <a:lvl5pPr>
-              <a:lnSpc>
-                <a:spcPct val="125000"/>
-              </a:lnSpc>
-              <a:spcAft>
-                <a:spcPts val="600"/>
-              </a:spcAft>
-              <a:defRPr sz="1800"/>
-            </a:lvl5pPr>
-          </a:lstStyle>
-          <a:p>
-            <a:pPr lvl="0"/>
-            <a:r>
-              <a:rPr lang="en-US" dirty="0"/>
-              <a:t>Click to add text</a:t>
-            </a:r>
-          </a:p>
-          <a:p>
-            <a:pPr lvl="1"/>
-            <a:r>
-              <a:rPr lang="en-US" dirty="0"/>
-              <a:t>Second level</a:t>
-            </a:r>
-          </a:p>
-          <a:p>
-            <a:pPr lvl="2"/>
-            <a:r>
-              <a:rPr lang="en-US" dirty="0"/>
-              <a:t>Third level</a:t>
-            </a:r>
-          </a:p>
-          <a:p>
-            <a:pPr lvl="3"/>
-            <a:r>
-              <a:rPr lang="en-US" dirty="0"/>
-              <a:t>Fourth level</a:t>
-            </a:r>
-          </a:p>
-          <a:p>
-            <a:pPr lvl="4"/>
-            <a:r>
-              <a:rPr lang="en-US" dirty="0"/>
-              <a:t>Fifth level</a:t>
-            </a:r>
-          </a:p>
-        </p:txBody>
-      </p:sp>
-      <p:sp>
-        <p:nvSpPr>
-          <p:cNvPr id="10" name="Rectangle 9">
-            <a:extLst>
-              <a:ext uri="{FF2B5EF4-FFF2-40B4-BE49-F238E27FC236}">
-                <a16:creationId xmlns:a16="http://schemas.microsoft.com/office/drawing/2014/main" id="{7278DD10-67BC-4E87-A788-A45C6093F5F8}"/>
-              </a:ext>
-              <a:ext uri="{C183D7F6-B498-43B3-948B-1728B52AA6E4}">
-                <adec:decorative xmlns:adec="http://schemas.microsoft.com/office/drawing/2017/decorative" val="1"/>
-              </a:ext>
-            </a:extLst>
-          </p:cNvPr>
-          <p:cNvSpPr/>
-          <p:nvPr userDrawn="1"/>
-        </p:nvSpPr>
-        <p:spPr>
-          <a:xfrm>
-            <a:off x="-1" y="962423"/>
-            <a:ext cx="1006766" cy="1216152"/>
-          </a:xfrm>
-          <a:prstGeom prst="rect">
-            <a:avLst/>
-          </a:prstGeom>
-          <a:solidFill>
-            <a:schemeClr val="accent1"/>
-          </a:solidFill>
-          <a:ln>
-            <a:noFill/>
-          </a:ln>
-        </p:spPr>
-        <p:style>
-          <a:lnRef idx="2">
-            <a:schemeClr val="accent1">
-              <a:shade val="50000"/>
-            </a:schemeClr>
-          </a:lnRef>
-          <a:fillRef idx="1">
-            <a:schemeClr val="accent1"/>
-          </a:fillRef>
-          <a:effectRef idx="0">
-            <a:schemeClr val="accent1"/>
-          </a:effectRef>
-          <a:fontRef idx="minor">
-            <a:schemeClr val="lt1"/>
-          </a:fontRef>
-        </p:style>
-        <p:txBody>
-          <a:bodyPr rtlCol="0" anchor="ctr"/>
-          <a:lstStyle/>
-          <a:p>
-            <a:pPr algn="ctr"/>
-            <a:endParaRPr lang="en-US" dirty="0"/>
-          </a:p>
-        </p:txBody>
-      </p:sp>
-      <p:sp>
-        <p:nvSpPr>
-          <p:cNvPr id="11" name="Rectangle 10">
-            <a:extLst>
-              <a:ext uri="{FF2B5EF4-FFF2-40B4-BE49-F238E27FC236}">
-                <a16:creationId xmlns:a16="http://schemas.microsoft.com/office/drawing/2014/main" id="{916769F5-486B-4B48-A543-2C70359DF66E}"/>
-              </a:ext>
-              <a:ext uri="{C183D7F6-B498-43B3-948B-1728B52AA6E4}">
-                <adec:decorative xmlns:adec="http://schemas.microsoft.com/office/drawing/2017/decorative" val="1"/>
-              </a:ext>
-            </a:extLst>
-          </p:cNvPr>
-          <p:cNvSpPr/>
-          <p:nvPr userDrawn="1"/>
-        </p:nvSpPr>
-        <p:spPr>
-          <a:xfrm rot="5400000">
-            <a:off x="-2390232" y="3396997"/>
-            <a:ext cx="6858002" cy="64008"/>
-          </a:xfrm>
-          <a:prstGeom prst="rect">
-            <a:avLst/>
-          </a:prstGeom>
-          <a:solidFill>
-            <a:schemeClr val="tx2"/>
-          </a:solidFill>
-          <a:ln>
-            <a:noFill/>
-          </a:ln>
-        </p:spPr>
-        <p:style>
-          <a:lnRef idx="2">
-            <a:schemeClr val="accent1">
-              <a:shade val="50000"/>
-            </a:schemeClr>
-          </a:lnRef>
-          <a:fillRef idx="1">
-            <a:schemeClr val="accent1"/>
-          </a:fillRef>
-          <a:effectRef idx="0">
-            <a:schemeClr val="accent1"/>
-          </a:effectRef>
-          <a:fontRef idx="minor">
-            <a:schemeClr val="lt1"/>
-          </a:fontRef>
-        </p:style>
-        <p:txBody>
-          <a:bodyPr rtlCol="0" anchor="ctr"/>
-          <a:lstStyle/>
-          <a:p>
-            <a:pPr algn="ctr"/>
-            <a:endParaRPr lang="en-US" dirty="0"/>
-          </a:p>
-        </p:txBody>
-      </p:sp>
-      <p:sp>
-        <p:nvSpPr>
-          <p:cNvPr id="12" name="Footer Placeholder 4">
-            <a:extLst>
-              <a:ext uri="{FF2B5EF4-FFF2-40B4-BE49-F238E27FC236}">
-                <a16:creationId xmlns:a16="http://schemas.microsoft.com/office/drawing/2014/main" id="{B47BB165-F380-48C4-B95B-C09C91893B2D}"/>
-              </a:ext>
-            </a:extLst>
-          </p:cNvPr>
-          <p:cNvSpPr>
-            <a:spLocks noGrp="1"/>
-          </p:cNvSpPr>
-          <p:nvPr>
-            <p:ph type="ftr" sz="quarter" idx="11"/>
-          </p:nvPr>
-        </p:nvSpPr>
-        <p:spPr>
-          <a:xfrm>
-            <a:off x="1535371" y="6309360"/>
-            <a:ext cx="5049579" cy="457200"/>
-          </a:xfrm>
-        </p:spPr>
-        <p:txBody>
-          <a:bodyPr/>
-          <a:lstStyle/>
-          <a:p>
-            <a:r>
-              <a:rPr lang="en-US" dirty="0"/>
-              <a:t>Presentation Title</a:t>
-            </a:r>
-          </a:p>
-        </p:txBody>
-      </p:sp>
-      <p:sp>
-        <p:nvSpPr>
-          <p:cNvPr id="14" name="Slide Number Placeholder 5">
-            <a:extLst>
-              <a:ext uri="{FF2B5EF4-FFF2-40B4-BE49-F238E27FC236}">
-                <a16:creationId xmlns:a16="http://schemas.microsoft.com/office/drawing/2014/main" id="{F0805E9B-6657-4167-BD79-CAC59C0D841D}"/>
-              </a:ext>
-            </a:extLst>
-          </p:cNvPr>
-          <p:cNvSpPr>
-            <a:spLocks noGrp="1"/>
-          </p:cNvSpPr>
-          <p:nvPr>
-            <p:ph type="sldNum" sz="quarter" idx="12"/>
-          </p:nvPr>
-        </p:nvSpPr>
-        <p:spPr>
-          <a:xfrm>
-            <a:off x="10569202" y="6309360"/>
-            <a:ext cx="979879" cy="457200"/>
-          </a:xfrm>
-        </p:spPr>
-        <p:txBody>
-          <a:bodyPr/>
-          <a:lstStyle>
-            <a:lvl1pPr>
-              <a:defRPr sz="1200" b="0"/>
-            </a:lvl1pPr>
-          </a:lstStyle>
-          <a:p>
-            <a:fld id="{FAEF9944-A4F6-4C59-AEBD-678D6480B8EA}" type="slidenum">
-              <a:rPr lang="en-US" smtClean="0"/>
-              <a:pPr/>
-              <a:t>‹#›</a:t>
-            </a:fld>
-            <a:endParaRPr lang="en-US" dirty="0"/>
-          </a:p>
-        </p:txBody>
-      </p:sp>
-      <p:sp>
-        <p:nvSpPr>
-          <p:cNvPr id="3" name="Date Placeholder 3">
-            <a:extLst>
-              <a:ext uri="{FF2B5EF4-FFF2-40B4-BE49-F238E27FC236}">
-                <a16:creationId xmlns:a16="http://schemas.microsoft.com/office/drawing/2014/main" id="{D0EFA1AD-93FB-148E-CFC6-A6E5D9967406}"/>
-              </a:ext>
-            </a:extLst>
-          </p:cNvPr>
-          <p:cNvSpPr>
-            <a:spLocks noGrp="1"/>
-          </p:cNvSpPr>
-          <p:nvPr>
-            <p:ph type="dt" sz="half" idx="10"/>
-          </p:nvPr>
-        </p:nvSpPr>
-        <p:spPr>
-          <a:xfrm>
-            <a:off x="6678168" y="6309360"/>
-            <a:ext cx="2148840" cy="457200"/>
-          </a:xfrm>
-        </p:spPr>
-        <p:txBody>
-          <a:bodyPr/>
-          <a:lstStyle>
-            <a:lvl1pPr algn="l">
-              <a:defRPr/>
-            </a:lvl1pPr>
-          </a:lstStyle>
-          <a:p>
-            <a:r>
-              <a:rPr lang="en-US" dirty="0"/>
-              <a:t>9/8/20XX</a:t>
-            </a:r>
-          </a:p>
-        </p:txBody>
-      </p:sp>
-    </p:spTree>
-    <p:extLst>
-      <p:ext uri="{BB962C8B-B14F-4D97-AF65-F5344CB8AC3E}">
-        <p14:creationId xmlns:p14="http://schemas.microsoft.com/office/powerpoint/2010/main" val="1616477606"/>
-      </p:ext>
-    </p:extLst>
-  </p:cSld>
-  <p:clrMapOvr>
-    <a:masterClrMapping/>
-  </p:clrMapOvr>
-</p:sldLayout>
-</file>
-
-<file path=ppt/slideLayouts/slideLayout16.xml><?xml version="1.0" encoding="utf-8"?>
-<p:sldLayout xmlns:a="http://schemas.openxmlformats.org/drawingml/2006/main" xmlns:r="http://schemas.openxmlformats.org/officeDocument/2006/relationships" xmlns:p="http://schemas.openxmlformats.org/presentationml/2006/main" userDrawn="1">
   <p:cSld name="Content 1">
     <p:spTree>
       <p:nvGrpSpPr>
@@ -5427,7 +4765,7 @@
 </p:sldLayout>
 </file>
 
-<file path=ppt/slideLayouts/slideLayout17.xml><?xml version="1.0" encoding="utf-8"?>
+<file path=ppt/slideLayouts/slideLayout16.xml><?xml version="1.0" encoding="utf-8"?>
 <p:sldLayout xmlns:a="http://schemas.openxmlformats.org/drawingml/2006/main" xmlns:r="http://schemas.openxmlformats.org/officeDocument/2006/relationships" xmlns:p="http://schemas.openxmlformats.org/presentationml/2006/main" showMasterSp="0" preserve="1" userDrawn="1">
   <p:cSld name="1_Title Only">
     <p:spTree>
@@ -7329,7 +6667,7 @@
           <a:p>
             <a:fld id="{005CD215-1C45-48A0-8534-39FFE8A7C95A}" type="datetime1">
               <a:rPr lang="en-US" smtClean="0"/>
-              <a:t>12/1/2025</a:t>
+              <a:t>12/3/25</a:t>
             </a:fld>
             <a:endParaRPr lang="en-US" dirty="0"/>
           </a:p>
@@ -9164,9 +8502,8 @@
     <p:sldLayoutId id="2147483698" r:id="rId12"/>
     <p:sldLayoutId id="2147483700" r:id="rId13"/>
     <p:sldLayoutId id="2147483701" r:id="rId14"/>
-    <p:sldLayoutId id="2147483704" r:id="rId15"/>
-    <p:sldLayoutId id="2147483709" r:id="rId16"/>
-    <p:sldLayoutId id="2147483682" r:id="rId17"/>
+    <p:sldLayoutId id="2147483709" r:id="rId15"/>
+    <p:sldLayoutId id="2147483682" r:id="rId16"/>
   </p:sldLayoutIdLst>
   <p:hf sldNum="0" hdr="0" ftr="0" dt="0"/>
   <p:txStyles>
@@ -9671,27 +9008,43 @@
           </a:bodyPr>
           <a:lstStyle/>
           <a:p>
+            <a:pPr marL="342900" indent="-342900">
+              <a:buFont typeface="Arial" panose="020B0604020202020204" pitchFamily="34" charset="0"/>
+              <a:buChar char="•"/>
+            </a:pPr>
             <a:r>
               <a:rPr lang="en-US" dirty="0"/>
-              <a:t>- Main page</a:t>
-            </a:r>
-          </a:p>
-          <a:p>
+              <a:t>Home page</a:t>
+            </a:r>
+          </a:p>
+          <a:p>
+            <a:pPr marL="342900" indent="-342900">
+              <a:buFont typeface="Arial" panose="020B0604020202020204" pitchFamily="34" charset="0"/>
+              <a:buChar char="•"/>
+            </a:pPr>
             <a:r>
               <a:rPr lang="en-US" dirty="0"/>
-              <a:t>- Product List</a:t>
-            </a:r>
-          </a:p>
-          <a:p>
+              <a:t>Product List</a:t>
+            </a:r>
+          </a:p>
+          <a:p>
+            <a:pPr marL="342900" indent="-342900">
+              <a:buFont typeface="Arial" panose="020B0604020202020204" pitchFamily="34" charset="0"/>
+              <a:buChar char="•"/>
+            </a:pPr>
             <a:r>
               <a:rPr lang="en-US" dirty="0"/>
-              <a:t>- FAQ</a:t>
-            </a:r>
-          </a:p>
-          <a:p>
+              <a:t>FAQ</a:t>
+            </a:r>
+          </a:p>
+          <a:p>
+            <a:pPr marL="342900" indent="-342900">
+              <a:buFont typeface="Arial" panose="020B0604020202020204" pitchFamily="34" charset="0"/>
+              <a:buChar char="•"/>
+            </a:pPr>
             <a:r>
               <a:rPr lang="en-US" dirty="0"/>
-              <a:t>- Chat page</a:t>
+              <a:t>Chat page</a:t>
             </a:r>
           </a:p>
         </p:txBody>
@@ -9755,7 +9108,7 @@
             <a:pPr algn="just"/>
             <a:r>
               <a:rPr lang="en-US" dirty="0"/>
-              <a:t>Front End</a:t>
+              <a:t>Frontend</a:t>
             </a:r>
           </a:p>
         </p:txBody>
@@ -9786,24 +9139,43 @@
           <a:bodyPr/>
           <a:lstStyle/>
           <a:p>
+            <a:pPr marL="342900" indent="-342900">
+              <a:buFont typeface="Arial" panose="020B0604020202020204" pitchFamily="34" charset="0"/>
+              <a:buChar char="•"/>
+            </a:pPr>
             <a:r>
               <a:rPr lang="en-US" dirty="0"/>
-              <a:t>- HTML</a:t>
-            </a:r>
-          </a:p>
-          <a:p>
+              <a:t>HTML</a:t>
+            </a:r>
+          </a:p>
+          <a:p>
+            <a:pPr marL="342900" indent="-342900">
+              <a:buFont typeface="Arial" panose="020B0604020202020204" pitchFamily="34" charset="0"/>
+              <a:buChar char="•"/>
+            </a:pPr>
             <a:r>
               <a:rPr lang="en-US" dirty="0"/>
-              <a:t>- CSS</a:t>
-            </a:r>
-          </a:p>
-          <a:p>
-            <a:endParaRPr lang="en-US" dirty="0"/>
-          </a:p>
-          <a:p>
+              <a:t>JS</a:t>
+            </a:r>
+          </a:p>
+          <a:p>
+            <a:pPr marL="342900" indent="-342900">
+              <a:buFont typeface="Arial" panose="020B0604020202020204" pitchFamily="34" charset="0"/>
+              <a:buChar char="•"/>
+            </a:pPr>
             <a:r>
               <a:rPr lang="en-US" dirty="0"/>
-              <a:t> </a:t>
+              <a:t>CSS</a:t>
+            </a:r>
+          </a:p>
+          <a:p>
+            <a:pPr marL="342900" indent="-342900">
+              <a:buFont typeface="Arial" panose="020B0604020202020204" pitchFamily="34" charset="0"/>
+              <a:buChar char="•"/>
+            </a:pPr>
+            <a:r>
+              <a:rPr lang="en-US" dirty="0"/>
+              <a:t>HTMX</a:t>
             </a:r>
           </a:p>
         </p:txBody>
@@ -9884,7 +9256,7 @@
           <a:p>
             <a:r>
               <a:rPr lang="en-US" dirty="0"/>
-              <a:t>Back End</a:t>
+              <a:t>Backend</a:t>
             </a:r>
           </a:p>
         </p:txBody>
@@ -9945,18 +9317,42 @@
           </a:bodyPr>
           <a:lstStyle/>
           <a:p>
+            <a:pPr marL="285750" indent="-285750">
+              <a:buFont typeface="Arial" panose="020B0604020202020204" pitchFamily="34" charset="0"/>
+              <a:buChar char="•"/>
+            </a:pPr>
             <a:r>
               <a:rPr lang="en-US" dirty="0"/>
-              <a:t>- Flask.js</a:t>
-            </a:r>
-          </a:p>
-          <a:p>
+              <a:t>Flask (Python)</a:t>
+            </a:r>
+          </a:p>
+          <a:p>
+            <a:pPr marL="285750" indent="-285750">
+              <a:buFont typeface="Arial" panose="020B0604020202020204" pitchFamily="34" charset="0"/>
+              <a:buChar char="•"/>
+            </a:pPr>
+            <a:r>
+              <a:rPr lang="en-US" dirty="0" err="1"/>
+              <a:t>Groq</a:t>
+            </a:r>
             <a:r>
               <a:rPr lang="en-US" dirty="0"/>
-              <a:t>- Chatbot</a:t>
-            </a:r>
-          </a:p>
-          <a:p>
+              <a:t> AI inference platform</a:t>
+            </a:r>
+          </a:p>
+          <a:p>
+            <a:pPr marL="285750" indent="-285750">
+              <a:buFont typeface="Arial" panose="020B0604020202020204" pitchFamily="34" charset="0"/>
+              <a:buChar char="•"/>
+            </a:pPr>
+            <a:r>
+              <a:rPr lang="en-US" dirty="0"/>
+              <a:t>Deployed to Heroku with </a:t>
+            </a:r>
+            <a:r>
+              <a:rPr lang="en-US" dirty="0" err="1"/>
+              <a:t>Gunicorn</a:t>
+            </a:r>
             <a:endParaRPr lang="en-US" dirty="0"/>
           </a:p>
         </p:txBody>
@@ -9979,7 +9375,13 @@
   <p:cSld>
     <p:spTree>
       <p:nvGrpSpPr>
-        <p:cNvPr id="1" name=""/>
+        <p:cNvPr id="1" name="">
+          <a:extLst>
+            <a:ext uri="{FF2B5EF4-FFF2-40B4-BE49-F238E27FC236}">
+              <a16:creationId xmlns:a16="http://schemas.microsoft.com/office/drawing/2014/main" id="{98BD3649-29F0-060F-9FB0-ED53AF40A42F}"/>
+            </a:ext>
+          </a:extLst>
+        </p:cNvPr>
         <p:cNvGrpSpPr/>
         <p:nvPr/>
       </p:nvGrpSpPr>
@@ -9996,7 +9398,7 @@
           <p:cNvPr id="2" name="Title 1">
             <a:extLst>
               <a:ext uri="{FF2B5EF4-FFF2-40B4-BE49-F238E27FC236}">
-                <a16:creationId xmlns:a16="http://schemas.microsoft.com/office/drawing/2014/main" id="{E2D30E0F-10C6-298A-C347-E831FFF4ECB8}"/>
+                <a16:creationId xmlns:a16="http://schemas.microsoft.com/office/drawing/2014/main" id="{551846AF-D2B7-6D16-1F33-6EFAAA105D54}"/>
               </a:ext>
             </a:extLst>
           </p:cNvPr>
@@ -10014,39 +9416,123 @@
           <a:p>
             <a:r>
               <a:rPr lang="en-US" dirty="0"/>
-              <a:t>Known Issues</a:t>
-            </a:r>
-          </a:p>
-        </p:txBody>
-      </p:sp>
-      <p:sp>
-        <p:nvSpPr>
-          <p:cNvPr id="3" name="Content Placeholder 2">
-            <a:extLst>
-              <a:ext uri="{FF2B5EF4-FFF2-40B4-BE49-F238E27FC236}">
-                <a16:creationId xmlns:a16="http://schemas.microsoft.com/office/drawing/2014/main" id="{41191CC7-9CF2-71F0-1AD4-791EA9CBAD97}"/>
-              </a:ext>
-            </a:extLst>
-          </p:cNvPr>
-          <p:cNvSpPr>
-            <a:spLocks noGrp="1"/>
-          </p:cNvSpPr>
-          <p:nvPr>
-            <p:ph sz="quarter" idx="18"/>
-          </p:nvPr>
-        </p:nvSpPr>
+              <a:t>Chatbot - Tubby</a:t>
+            </a:r>
+          </a:p>
+        </p:txBody>
+      </p:sp>
+      <p:pic>
+        <p:nvPicPr>
+          <p:cNvPr id="9" name="Content Placeholder 8" descr="Person alone in an office">
+            <a:extLst>
+              <a:ext uri="{FF2B5EF4-FFF2-40B4-BE49-F238E27FC236}">
+                <a16:creationId xmlns:a16="http://schemas.microsoft.com/office/drawing/2014/main" id="{94BDBF84-2557-7163-0F05-ACD7ABF75EA4}"/>
+              </a:ext>
+            </a:extLst>
+          </p:cNvPr>
+          <p:cNvPicPr>
+            <a:picLocks noGrp="1" noChangeAspect="1"/>
+          </p:cNvPicPr>
+          <p:nvPr>
+            <p:ph sz="quarter" idx="16"/>
+          </p:nvPr>
+        </p:nvPicPr>
+        <p:blipFill>
+          <a:blip r:embed="rId3" cstate="screen">
+            <a:extLst>
+              <a:ext uri="{28A0092B-C50C-407E-A947-70E740481C1C}">
+                <a14:useLocalDpi xmlns:a14="http://schemas.microsoft.com/office/drawing/2010/main"/>
+              </a:ext>
+            </a:extLst>
+          </a:blip>
+          <a:stretch/>
+        </p:blipFill>
         <p:spPr>
           <a:xfrm>
-            <a:off x="1542563" y="2590800"/>
-            <a:ext cx="10013710" cy="3718557"/>
-          </a:xfrm>
-        </p:spPr>
+            <a:off x="0" y="1038"/>
+            <a:ext cx="4613275" cy="6855923"/>
+          </a:xfrm>
+        </p:spPr>
+      </p:pic>
+      <p:sp>
+        <p:nvSpPr>
+          <p:cNvPr id="6" name="Content Placeholder 5">
+            <a:extLst>
+              <a:ext uri="{FF2B5EF4-FFF2-40B4-BE49-F238E27FC236}">
+                <a16:creationId xmlns:a16="http://schemas.microsoft.com/office/drawing/2014/main" id="{CC061F7E-D98C-A114-7372-F0155FCEBBB2}"/>
+              </a:ext>
+            </a:extLst>
+          </p:cNvPr>
+          <p:cNvSpPr>
+            <a:spLocks noGrp="1"/>
+          </p:cNvSpPr>
+          <p:nvPr>
+            <p:ph sz="quarter" idx="15"/>
+          </p:nvPr>
+        </p:nvSpPr>
+        <p:spPr/>
         <p:txBody>
           <a:bodyPr>
             <a:normAutofit/>
           </a:bodyPr>
           <a:lstStyle/>
           <a:p>
+            <a:pPr marL="285750" indent="-285750">
+              <a:buFont typeface="Arial" panose="020B0604020202020204" pitchFamily="34" charset="0"/>
+              <a:buChar char="•"/>
+            </a:pPr>
+            <a:r>
+              <a:rPr lang="en-US" dirty="0"/>
+              <a:t>Uses Meta Llama 4 Scout 17b-16e-instruct LLM</a:t>
+            </a:r>
+          </a:p>
+          <a:p>
+            <a:pPr marL="285750" indent="-285750">
+              <a:buFont typeface="Arial" panose="020B0604020202020204" pitchFamily="34" charset="0"/>
+              <a:buChar char="•"/>
+            </a:pPr>
+            <a:r>
+              <a:rPr lang="en-US" dirty="0"/>
+              <a:t>Has access to a Json file with all hot tub details</a:t>
+            </a:r>
+          </a:p>
+          <a:p>
+            <a:pPr marL="285750" indent="-285750">
+              <a:buFont typeface="Arial" panose="020B0604020202020204" pitchFamily="34" charset="0"/>
+              <a:buChar char="•"/>
+            </a:pPr>
+            <a:r>
+              <a:rPr lang="en-US" dirty="0"/>
+              <a:t>Given instructions to format text properly and have </a:t>
+            </a:r>
+            <a:r>
+              <a:rPr lang="en-US"/>
+              <a:t>predictable behavior</a:t>
+            </a:r>
+            <a:endParaRPr lang="en-US" dirty="0"/>
+          </a:p>
+          <a:p>
+            <a:pPr marL="285750" indent="-285750">
+              <a:buFont typeface="Arial" panose="020B0604020202020204" pitchFamily="34" charset="0"/>
+              <a:buChar char="•"/>
+            </a:pPr>
+            <a:r>
+              <a:rPr lang="en-US" dirty="0"/>
+              <a:t>Temperature 0.5</a:t>
+            </a:r>
+          </a:p>
+          <a:p>
+            <a:pPr marL="285750" indent="-285750">
+              <a:buFont typeface="Arial" panose="020B0604020202020204" pitchFamily="34" charset="0"/>
+              <a:buChar char="•"/>
+            </a:pPr>
+            <a:endParaRPr lang="en-US" dirty="0"/>
+          </a:p>
+          <a:p>
+            <a:pPr marL="285750" indent="-285750">
+              <a:buFont typeface="Arial" panose="020B0604020202020204" pitchFamily="34" charset="0"/>
+              <a:buChar char="•"/>
+            </a:pPr>
             <a:endParaRPr lang="en-US" dirty="0"/>
           </a:p>
         </p:txBody>
@@ -10054,7 +9540,7 @@
     </p:spTree>
     <p:extLst>
       <p:ext uri="{BB962C8B-B14F-4D97-AF65-F5344CB8AC3E}">
-        <p14:creationId xmlns:p14="http://schemas.microsoft.com/office/powerpoint/2010/main" val="2225637236"/>
+        <p14:creationId xmlns:p14="http://schemas.microsoft.com/office/powerpoint/2010/main" val="3855332209"/>
       </p:ext>
     </p:extLst>
   </p:cSld>
@@ -10896,35 +10382,6 @@
 </file>
 
 <file path=customXml/item1.xml><?xml version="1.0" encoding="utf-8"?>
-<?mso-contentType ?>
-<FormTemplates xmlns="http://schemas.microsoft.com/sharepoint/v3/contenttype/forms">
-  <Display>DocumentLibraryForm</Display>
-  <Edit>DocumentLibraryForm</Edit>
-  <New>DocumentLibraryForm</New>
-</FormTemplates>
-</file>
-
-<file path=customXml/item2.xml><?xml version="1.0" encoding="utf-8"?>
-<p:properties xmlns:p="http://schemas.microsoft.com/office/2006/metadata/properties" xmlns:xsi="http://www.w3.org/2001/XMLSchema-instance" xmlns:pc="http://schemas.microsoft.com/office/infopath/2007/PartnerControls">
-  <documentManagement>
-    <_ip_UnifiedCompliancePolicyUIAction xmlns="http://schemas.microsoft.com/sharepoint/v3" xsi:nil="true"/>
-    <Image xmlns="71af3243-3dd4-4a8d-8c0d-dd76da1f02a5">
-      <Url xsi:nil="true"/>
-      <Description xsi:nil="true"/>
-    </Image>
-    <Status xmlns="71af3243-3dd4-4a8d-8c0d-dd76da1f02a5">Not started</Status>
-    <Background xmlns="71af3243-3dd4-4a8d-8c0d-dd76da1f02a5">false</Background>
-    <_ip_UnifiedCompliancePolicyProperties xmlns="http://schemas.microsoft.com/sharepoint/v3" xsi:nil="true"/>
-    <ImageTagsTaxHTField xmlns="71af3243-3dd4-4a8d-8c0d-dd76da1f02a5">
-      <Terms xmlns="http://schemas.microsoft.com/office/infopath/2007/PartnerControls"/>
-    </ImageTagsTaxHTField>
-    <TaxCatchAll xmlns="230e9df3-be65-4c73-a93b-d1236ebd677e" xsi:nil="true"/>
-    <MediaServiceKeyPoints xmlns="71af3243-3dd4-4a8d-8c0d-dd76da1f02a5" xsi:nil="true"/>
-  </documentManagement>
-</p:properties>
-</file>
-
-<file path=customXml/item3.xml><?xml version="1.0" encoding="utf-8"?>
 <ct:contentTypeSchema xmlns:ct="http://schemas.microsoft.com/office/2006/metadata/contentType" xmlns:ma="http://schemas.microsoft.com/office/2006/metadata/properties/metaAttributes" ct:_="" ma:_="" ma:contentTypeName="Document" ma:contentTypeID="0x01010079F111ED35F8CC479449609E8A0923A6" ma:contentTypeVersion="28" ma:contentTypeDescription="Create a new document." ma:contentTypeScope="" ma:versionID="60f5a4f2d2b0abadcf532d48ebf9cb71">
   <xsd:schema xmlns:xsd="http://www.w3.org/2001/XMLSchema" xmlns:xs="http://www.w3.org/2001/XMLSchema" xmlns:p="http://schemas.microsoft.com/office/2006/metadata/properties" xmlns:ns1="http://schemas.microsoft.com/sharepoint/v3" xmlns:ns2="71af3243-3dd4-4a8d-8c0d-dd76da1f02a5" xmlns:ns3="16c05727-aa75-4e4a-9b5f-8a80a1165891" xmlns:ns4="230e9df3-be65-4c73-a93b-d1236ebd677e" targetNamespace="http://schemas.microsoft.com/office/2006/metadata/properties" ma:root="true" ma:fieldsID="7dd78129e6a1811f84807ad11c651531" ns1:_="" ns2:_="" ns3:_="" ns4:_="">
     <xsd:import namespace="http://schemas.microsoft.com/sharepoint/v3"/>
@@ -11236,27 +10693,36 @@
 </ct:contentTypeSchema>
 </file>
 
-<file path=customXml/itemProps1.xml><?xml version="1.0" encoding="utf-8"?>
-<ds:datastoreItem xmlns:ds="http://schemas.openxmlformats.org/officeDocument/2006/customXml" ds:itemID="{6F36CB81-A037-44A8-88EB-C0C0F17FD4B1}">
-  <ds:schemaRefs>
-    <ds:schemaRef ds:uri="http://schemas.microsoft.com/sharepoint/v3/contenttype/forms"/>
-  </ds:schemaRefs>
-</ds:datastoreItem>
+<file path=customXml/item2.xml><?xml version="1.0" encoding="utf-8"?>
+<p:properties xmlns:p="http://schemas.microsoft.com/office/2006/metadata/properties" xmlns:xsi="http://www.w3.org/2001/XMLSchema-instance" xmlns:pc="http://schemas.microsoft.com/office/infopath/2007/PartnerControls">
+  <documentManagement>
+    <_ip_UnifiedCompliancePolicyUIAction xmlns="http://schemas.microsoft.com/sharepoint/v3" xsi:nil="true"/>
+    <Image xmlns="71af3243-3dd4-4a8d-8c0d-dd76da1f02a5">
+      <Url xsi:nil="true"/>
+      <Description xsi:nil="true"/>
+    </Image>
+    <Status xmlns="71af3243-3dd4-4a8d-8c0d-dd76da1f02a5">Not started</Status>
+    <Background xmlns="71af3243-3dd4-4a8d-8c0d-dd76da1f02a5">false</Background>
+    <_ip_UnifiedCompliancePolicyProperties xmlns="http://schemas.microsoft.com/sharepoint/v3" xsi:nil="true"/>
+    <ImageTagsTaxHTField xmlns="71af3243-3dd4-4a8d-8c0d-dd76da1f02a5">
+      <Terms xmlns="http://schemas.microsoft.com/office/infopath/2007/PartnerControls"/>
+    </ImageTagsTaxHTField>
+    <TaxCatchAll xmlns="230e9df3-be65-4c73-a93b-d1236ebd677e" xsi:nil="true"/>
+    <MediaServiceKeyPoints xmlns="71af3243-3dd4-4a8d-8c0d-dd76da1f02a5" xsi:nil="true"/>
+  </documentManagement>
+</p:properties>
 </file>
 
-<file path=customXml/itemProps2.xml><?xml version="1.0" encoding="utf-8"?>
-<ds:datastoreItem xmlns:ds="http://schemas.openxmlformats.org/officeDocument/2006/customXml" ds:itemID="{57FF477C-132F-44F8-8C56-EBFF95FAF97B}">
-  <ds:schemaRefs>
-    <ds:schemaRef ds:uri="http://schemas.microsoft.com/office/2006/metadata/properties"/>
-    <ds:schemaRef ds:uri="http://schemas.microsoft.com/office/infopath/2007/PartnerControls"/>
-    <ds:schemaRef ds:uri="http://schemas.microsoft.com/sharepoint/v3"/>
-    <ds:schemaRef ds:uri="71af3243-3dd4-4a8d-8c0d-dd76da1f02a5"/>
-    <ds:schemaRef ds:uri="230e9df3-be65-4c73-a93b-d1236ebd677e"/>
-  </ds:schemaRefs>
-</ds:datastoreItem>
+<file path=customXml/item3.xml><?xml version="1.0" encoding="utf-8"?>
+<?mso-contentType ?>
+<FormTemplates xmlns="http://schemas.microsoft.com/sharepoint/v3/contenttype/forms">
+  <Display>DocumentLibraryForm</Display>
+  <Edit>DocumentLibraryForm</Edit>
+  <New>DocumentLibraryForm</New>
+</FormTemplates>
 </file>
 
-<file path=customXml/itemProps3.xml><?xml version="1.0" encoding="utf-8"?>
+<file path=customXml/itemProps1.xml><?xml version="1.0" encoding="utf-8"?>
 <ds:datastoreItem xmlns:ds="http://schemas.openxmlformats.org/officeDocument/2006/customXml" ds:itemID="{2C1AA24C-4CA6-40FF-8947-DA1F6F47456C}">
   <ds:schemaRefs>
     <ds:schemaRef ds:uri="http://schemas.microsoft.com/office/2006/metadata/contentType"/>
@@ -11277,6 +10743,26 @@
 </ds:datastoreItem>
 </file>
 
+<file path=customXml/itemProps2.xml><?xml version="1.0" encoding="utf-8"?>
+<ds:datastoreItem xmlns:ds="http://schemas.openxmlformats.org/officeDocument/2006/customXml" ds:itemID="{57FF477C-132F-44F8-8C56-EBFF95FAF97B}">
+  <ds:schemaRefs>
+    <ds:schemaRef ds:uri="http://schemas.microsoft.com/office/2006/metadata/properties"/>
+    <ds:schemaRef ds:uri="http://schemas.microsoft.com/office/infopath/2007/PartnerControls"/>
+    <ds:schemaRef ds:uri="http://schemas.microsoft.com/sharepoint/v3"/>
+    <ds:schemaRef ds:uri="71af3243-3dd4-4a8d-8c0d-dd76da1f02a5"/>
+    <ds:schemaRef ds:uri="230e9df3-be65-4c73-a93b-d1236ebd677e"/>
+  </ds:schemaRefs>
+</ds:datastoreItem>
+</file>
+
+<file path=customXml/itemProps3.xml><?xml version="1.0" encoding="utf-8"?>
+<ds:datastoreItem xmlns:ds="http://schemas.openxmlformats.org/officeDocument/2006/customXml" ds:itemID="{6F36CB81-A037-44A8-88EB-C0C0F17FD4B1}">
+  <ds:schemaRefs>
+    <ds:schemaRef ds:uri="http://schemas.microsoft.com/sharepoint/v3/contenttype/forms"/>
+  </ds:schemaRefs>
+</ds:datastoreItem>
+</file>
+
 <file path=docMetadata/LabelInfo.xml><?xml version="1.0" encoding="utf-8"?>
 <clbl:labelList xmlns:clbl="http://schemas.microsoft.com/office/2020/mipLabelMetadata"/>
 </file>
--- a/WebDev_Presentation.pptx
+++ b/WebDev_Presentation.pptx
@@ -5,10 +5,10 @@
     <p:sldMasterId id="2147483686" r:id="rId4"/>
   </p:sldMasterIdLst>
   <p:notesMasterIdLst>
-    <p:notesMasterId r:id="rId11"/>
+    <p:notesMasterId r:id="rId12"/>
   </p:notesMasterIdLst>
   <p:handoutMasterIdLst>
-    <p:handoutMasterId r:id="rId12"/>
+    <p:handoutMasterId r:id="rId13"/>
   </p:handoutMasterIdLst>
   <p:sldIdLst>
     <p:sldId id="315" r:id="rId5"/>
@@ -16,7 +16,8 @@
     <p:sldId id="271" r:id="rId7"/>
     <p:sldId id="309" r:id="rId8"/>
     <p:sldId id="316" r:id="rId9"/>
-    <p:sldId id="295" r:id="rId10"/>
+    <p:sldId id="317" r:id="rId10"/>
+    <p:sldId id="295" r:id="rId11"/>
   </p:sldIdLst>
   <p:sldSz cx="12192000" cy="6858000"/>
   <p:notesSz cx="6858000" cy="9144000"/>
@@ -1154,7 +1155,13 @@
   <p:cSld>
     <p:spTree>
       <p:nvGrpSpPr>
-        <p:cNvPr id="1" name=""/>
+        <p:cNvPr id="1" name="">
+          <a:extLst>
+            <a:ext uri="{FF2B5EF4-FFF2-40B4-BE49-F238E27FC236}">
+              <a16:creationId xmlns:a16="http://schemas.microsoft.com/office/drawing/2014/main" id="{283BB921-4ED0-265B-2DD5-696DF3867757}"/>
+            </a:ext>
+          </a:extLst>
+        </p:cNvPr>
         <p:cNvGrpSpPr/>
         <p:nvPr/>
       </p:nvGrpSpPr>
@@ -1168,7 +1175,13 @@
       </p:grpSpPr>
       <p:sp>
         <p:nvSpPr>
-          <p:cNvPr id="2" name="Slide Image Placeholder 1"/>
+          <p:cNvPr id="2" name="Slide Image Placeholder 1">
+            <a:extLst>
+              <a:ext uri="{FF2B5EF4-FFF2-40B4-BE49-F238E27FC236}">
+                <a16:creationId xmlns:a16="http://schemas.microsoft.com/office/drawing/2014/main" id="{6B8A3742-2A02-B487-B474-8400AB58FCFB}"/>
+              </a:ext>
+            </a:extLst>
+          </p:cNvPr>
           <p:cNvSpPr>
             <a:spLocks noGrp="1" noRot="1" noChangeAspect="1"/>
           </p:cNvSpPr>
@@ -1180,7 +1193,13 @@
       </p:sp>
       <p:sp>
         <p:nvSpPr>
-          <p:cNvPr id="3" name="Notes Placeholder 2"/>
+          <p:cNvPr id="3" name="Notes Placeholder 2">
+            <a:extLst>
+              <a:ext uri="{FF2B5EF4-FFF2-40B4-BE49-F238E27FC236}">
+                <a16:creationId xmlns:a16="http://schemas.microsoft.com/office/drawing/2014/main" id="{D14DBF20-EA72-FD3A-B4EF-7533165408E9}"/>
+              </a:ext>
+            </a:extLst>
+          </p:cNvPr>
           <p:cNvSpPr>
             <a:spLocks noGrp="1"/>
           </p:cNvSpPr>
@@ -1216,7 +1235,13 @@
       </p:sp>
       <p:sp>
         <p:nvSpPr>
-          <p:cNvPr id="4" name="Slide Number Placeholder 3"/>
+          <p:cNvPr id="4" name="Slide Number Placeholder 3">
+            <a:extLst>
+              <a:ext uri="{FF2B5EF4-FFF2-40B4-BE49-F238E27FC236}">
+                <a16:creationId xmlns:a16="http://schemas.microsoft.com/office/drawing/2014/main" id="{B86B92DF-A672-A12A-E7E4-1FEF535CE20E}"/>
+              </a:ext>
+            </a:extLst>
+          </p:cNvPr>
           <p:cNvSpPr>
             <a:spLocks noGrp="1"/>
           </p:cNvSpPr>
@@ -1232,6 +1257,107 @@
             <a:fld id="{F07F282E-55F5-4803-B60F-09BA4600E538}" type="slidenum">
               <a:rPr lang="en-US" smtClean="0"/>
               <a:t>6</a:t>
+            </a:fld>
+            <a:endParaRPr lang="en-US" dirty="0"/>
+          </a:p>
+        </p:txBody>
+      </p:sp>
+    </p:spTree>
+    <p:extLst>
+      <p:ext uri="{BB962C8B-B14F-4D97-AF65-F5344CB8AC3E}">
+        <p14:creationId xmlns:p14="http://schemas.microsoft.com/office/powerpoint/2010/main" val="532087785"/>
+      </p:ext>
+    </p:extLst>
+  </p:cSld>
+  <p:clrMapOvr>
+    <a:masterClrMapping/>
+  </p:clrMapOvr>
+</p:notes>
+</file>
+
+<file path=ppt/notesSlides/notesSlide7.xml><?xml version="1.0" encoding="utf-8"?>
+<p:notes xmlns:a="http://schemas.openxmlformats.org/drawingml/2006/main" xmlns:r="http://schemas.openxmlformats.org/officeDocument/2006/relationships" xmlns:p="http://schemas.openxmlformats.org/presentationml/2006/main">
+  <p:cSld>
+    <p:spTree>
+      <p:nvGrpSpPr>
+        <p:cNvPr id="1" name=""/>
+        <p:cNvGrpSpPr/>
+        <p:nvPr/>
+      </p:nvGrpSpPr>
+      <p:grpSpPr>
+        <a:xfrm>
+          <a:off x="0" y="0"/>
+          <a:ext cx="0" cy="0"/>
+          <a:chOff x="0" y="0"/>
+          <a:chExt cx="0" cy="0"/>
+        </a:xfrm>
+      </p:grpSpPr>
+      <p:sp>
+        <p:nvSpPr>
+          <p:cNvPr id="2" name="Slide Image Placeholder 1"/>
+          <p:cNvSpPr>
+            <a:spLocks noGrp="1" noRot="1" noChangeAspect="1"/>
+          </p:cNvSpPr>
+          <p:nvPr>
+            <p:ph type="sldImg"/>
+          </p:nvPr>
+        </p:nvSpPr>
+        <p:spPr/>
+      </p:sp>
+      <p:sp>
+        <p:nvSpPr>
+          <p:cNvPr id="3" name="Notes Placeholder 2"/>
+          <p:cNvSpPr>
+            <a:spLocks noGrp="1"/>
+          </p:cNvSpPr>
+          <p:nvPr>
+            <p:ph type="body" idx="1"/>
+          </p:nvPr>
+        </p:nvSpPr>
+        <p:spPr/>
+        <p:txBody>
+          <a:bodyPr/>
+          <a:lstStyle/>
+          <a:p>
+            <a:pPr marL="0" marR="0" lvl="0" indent="0" algn="l" defTabSz="914400" rtl="0" eaLnBrk="1" fontAlgn="auto" latinLnBrk="0" hangingPunct="1">
+              <a:lnSpc>
+                <a:spcPct val="100000"/>
+              </a:lnSpc>
+              <a:spcBef>
+                <a:spcPts val="0"/>
+              </a:spcBef>
+              <a:spcAft>
+                <a:spcPts val="0"/>
+              </a:spcAft>
+              <a:buClrTx/>
+              <a:buSzTx/>
+              <a:buFontTx/>
+              <a:buNone/>
+              <a:tabLst/>
+              <a:defRPr/>
+            </a:pPr>
+            <a:endParaRPr lang="en-US" dirty="0"/>
+          </a:p>
+        </p:txBody>
+      </p:sp>
+      <p:sp>
+        <p:nvSpPr>
+          <p:cNvPr id="4" name="Slide Number Placeholder 3"/>
+          <p:cNvSpPr>
+            <a:spLocks noGrp="1"/>
+          </p:cNvSpPr>
+          <p:nvPr>
+            <p:ph type="sldNum" sz="quarter" idx="5"/>
+          </p:nvPr>
+        </p:nvSpPr>
+        <p:spPr/>
+        <p:txBody>
+          <a:bodyPr/>
+          <a:lstStyle/>
+          <a:p>
+            <a:fld id="{F07F282E-55F5-4803-B60F-09BA4600E538}" type="slidenum">
+              <a:rPr lang="en-US" smtClean="0"/>
+              <a:t>7</a:t>
             </a:fld>
             <a:endParaRPr lang="en-US" dirty="0"/>
           </a:p>
@@ -8980,7 +9106,7 @@
           <a:p>
             <a:r>
               <a:rPr lang="en-US" dirty="0"/>
-              <a:t>Hot Tub Store</a:t>
+              <a:t>Website – Hot Tub Store</a:t>
             </a:r>
           </a:p>
         </p:txBody>
@@ -9503,13 +9629,8 @@
             </a:pPr>
             <a:r>
               <a:rPr lang="en-US" dirty="0"/>
-              <a:t>Given instructions to format text properly and have </a:t>
-            </a:r>
-            <a:r>
-              <a:rPr lang="en-US"/>
-              <a:t>predictable behavior</a:t>
-            </a:r>
-            <a:endParaRPr lang="en-US" dirty="0"/>
+              <a:t>Given instructions to format text properly and have predictable behavior</a:t>
+            </a:r>
           </a:p>
           <a:p>
             <a:pPr marL="285750" indent="-285750">
@@ -9551,6 +9672,70 @@
 </file>
 
 <file path=ppt/slides/slide6.xml><?xml version="1.0" encoding="utf-8"?>
+<p:sld xmlns:a="http://schemas.openxmlformats.org/drawingml/2006/main" xmlns:r="http://schemas.openxmlformats.org/officeDocument/2006/relationships" xmlns:p="http://schemas.openxmlformats.org/presentationml/2006/main">
+  <p:cSld>
+    <p:spTree>
+      <p:nvGrpSpPr>
+        <p:cNvPr id="1" name="">
+          <a:extLst>
+            <a:ext uri="{FF2B5EF4-FFF2-40B4-BE49-F238E27FC236}">
+              <a16:creationId xmlns:a16="http://schemas.microsoft.com/office/drawing/2014/main" id="{A91AB069-1122-9545-983C-1E1E3A0A7100}"/>
+            </a:ext>
+          </a:extLst>
+        </p:cNvPr>
+        <p:cNvGrpSpPr/>
+        <p:nvPr/>
+      </p:nvGrpSpPr>
+      <p:grpSpPr>
+        <a:xfrm>
+          <a:off x="0" y="0"/>
+          <a:ext cx="0" cy="0"/>
+          <a:chOff x="0" y="0"/>
+          <a:chExt cx="0" cy="0"/>
+        </a:xfrm>
+      </p:grpSpPr>
+      <p:sp>
+        <p:nvSpPr>
+          <p:cNvPr id="4" name="Title 3">
+            <a:extLst>
+              <a:ext uri="{FF2B5EF4-FFF2-40B4-BE49-F238E27FC236}">
+                <a16:creationId xmlns:a16="http://schemas.microsoft.com/office/drawing/2014/main" id="{968CD9A0-7EC4-CD64-7249-D2B4EBC4F3DF}"/>
+              </a:ext>
+            </a:extLst>
+          </p:cNvPr>
+          <p:cNvSpPr>
+            <a:spLocks noGrp="1"/>
+          </p:cNvSpPr>
+          <p:nvPr>
+            <p:ph type="title"/>
+          </p:nvPr>
+        </p:nvSpPr>
+        <p:spPr/>
+        <p:txBody>
+          <a:bodyPr/>
+          <a:lstStyle/>
+          <a:p>
+            <a:r>
+              <a:rPr lang="en-US" sz="3800" dirty="0"/>
+              <a:t>Demonstration</a:t>
+            </a:r>
+          </a:p>
+        </p:txBody>
+      </p:sp>
+    </p:spTree>
+    <p:extLst>
+      <p:ext uri="{BB962C8B-B14F-4D97-AF65-F5344CB8AC3E}">
+        <p14:creationId xmlns:p14="http://schemas.microsoft.com/office/powerpoint/2010/main" val="1179570114"/>
+      </p:ext>
+    </p:extLst>
+  </p:cSld>
+  <p:clrMapOvr>
+    <a:masterClrMapping/>
+  </p:clrMapOvr>
+</p:sld>
+</file>
+
+<file path=ppt/slides/slide7.xml><?xml version="1.0" encoding="utf-8"?>
 <p:sld xmlns:a="http://schemas.openxmlformats.org/drawingml/2006/main" xmlns:r="http://schemas.openxmlformats.org/officeDocument/2006/relationships" xmlns:p="http://schemas.openxmlformats.org/presentationml/2006/main">
   <p:cSld>
     <p:spTree>
